--- a/slides/Quản Lí Quán Cà Phê.pptx
+++ b/slides/Quản Lí Quán Cà Phê.pptx
@@ -14,36 +14,35 @@
     <p:sldId id="262" r:id="rId8"/>
     <p:sldId id="263" r:id="rId9"/>
     <p:sldId id="264" r:id="rId10"/>
-    <p:sldId id="270" r:id="rId11"/>
-    <p:sldId id="271" r:id="rId12"/>
-    <p:sldId id="265" r:id="rId13"/>
-    <p:sldId id="266" r:id="rId14"/>
-    <p:sldId id="267" r:id="rId15"/>
-    <p:sldId id="268" r:id="rId16"/>
-    <p:sldId id="269" r:id="rId17"/>
+    <p:sldId id="271" r:id="rId11"/>
+    <p:sldId id="265" r:id="rId12"/>
+    <p:sldId id="266" r:id="rId13"/>
+    <p:sldId id="267" r:id="rId14"/>
+    <p:sldId id="268" r:id="rId15"/>
+    <p:sldId id="269" r:id="rId16"/>
   </p:sldIdLst>
   <p:sldSz cx="18288000" cy="10287000"/>
   <p:notesSz cx="6858000" cy="9144000"/>
   <p:embeddedFontLst>
     <p:embeddedFont>
       <p:font typeface="Canva Sans" panose="020B0604020202020204" charset="0"/>
+      <p:regular r:id="rId17"/>
+    </p:embeddedFont>
+    <p:embeddedFont>
+      <p:font typeface="Cormorant Garamond Bold Italics" panose="020B0604020202020204" charset="0"/>
       <p:regular r:id="rId18"/>
     </p:embeddedFont>
     <p:embeddedFont>
-      <p:font typeface="Cormorant Garamond Bold Italics" panose="020B0604020202020204" charset="0"/>
+      <p:font typeface="DM Serif Display" pitchFamily="2" charset="0"/>
       <p:regular r:id="rId19"/>
     </p:embeddedFont>
     <p:embeddedFont>
-      <p:font typeface="DM Serif Display" pitchFamily="2" charset="0"/>
+      <p:font typeface="Quicksand" panose="020B0604020202020204" charset="0"/>
       <p:regular r:id="rId20"/>
     </p:embeddedFont>
     <p:embeddedFont>
-      <p:font typeface="Quicksand" panose="020B0604020202020204" charset="0"/>
+      <p:font typeface="Quicksand Bold" panose="020B0604020202020204" charset="0"/>
       <p:regular r:id="rId21"/>
-    </p:embeddedFont>
-    <p:embeddedFont>
-      <p:font typeface="Quicksand Bold" panose="020B0604020202020204" charset="0"/>
-      <p:regular r:id="rId22"/>
     </p:embeddedFont>
   </p:embeddedFontLst>
   <p:defaultTextStyle>
@@ -340,7 +339,7 @@
             <a:fld id="{1D8BD707-D9CF-40AE-B4C6-C98DA3205C09}" type="datetimeFigureOut">
               <a:rPr lang="en-US" smtClean="0"/>
               <a:pPr/>
-              <a:t>7/6/2026</a:t>
+              <a:t>7/8/2026</a:t>
             </a:fld>
             <a:endParaRPr lang="en-US"/>
           </a:p>
@@ -505,7 +504,7 @@
             <a:fld id="{1D8BD707-D9CF-40AE-B4C6-C98DA3205C09}" type="datetimeFigureOut">
               <a:rPr lang="en-US" smtClean="0"/>
               <a:pPr/>
-              <a:t>7/6/2026</a:t>
+              <a:t>7/8/2026</a:t>
             </a:fld>
             <a:endParaRPr lang="en-US"/>
           </a:p>
@@ -680,7 +679,7 @@
             <a:fld id="{1D8BD707-D9CF-40AE-B4C6-C98DA3205C09}" type="datetimeFigureOut">
               <a:rPr lang="en-US" smtClean="0"/>
               <a:pPr/>
-              <a:t>7/6/2026</a:t>
+              <a:t>7/8/2026</a:t>
             </a:fld>
             <a:endParaRPr lang="en-US"/>
           </a:p>
@@ -845,7 +844,7 @@
             <a:fld id="{1D8BD707-D9CF-40AE-B4C6-C98DA3205C09}" type="datetimeFigureOut">
               <a:rPr lang="en-US" smtClean="0"/>
               <a:pPr/>
-              <a:t>7/6/2026</a:t>
+              <a:t>7/8/2026</a:t>
             </a:fld>
             <a:endParaRPr lang="en-US"/>
           </a:p>
@@ -1087,7 +1086,7 @@
             <a:fld id="{1D8BD707-D9CF-40AE-B4C6-C98DA3205C09}" type="datetimeFigureOut">
               <a:rPr lang="en-US" smtClean="0"/>
               <a:pPr/>
-              <a:t>7/6/2026</a:t>
+              <a:t>7/8/2026</a:t>
             </a:fld>
             <a:endParaRPr lang="en-US"/>
           </a:p>
@@ -1369,7 +1368,7 @@
             <a:fld id="{1D8BD707-D9CF-40AE-B4C6-C98DA3205C09}" type="datetimeFigureOut">
               <a:rPr lang="en-US" smtClean="0"/>
               <a:pPr/>
-              <a:t>7/6/2026</a:t>
+              <a:t>7/8/2026</a:t>
             </a:fld>
             <a:endParaRPr lang="en-US"/>
           </a:p>
@@ -1785,7 +1784,7 @@
             <a:fld id="{1D8BD707-D9CF-40AE-B4C6-C98DA3205C09}" type="datetimeFigureOut">
               <a:rPr lang="en-US" smtClean="0"/>
               <a:pPr/>
-              <a:t>7/6/2026</a:t>
+              <a:t>7/8/2026</a:t>
             </a:fld>
             <a:endParaRPr lang="en-US"/>
           </a:p>
@@ -1899,7 +1898,7 @@
             <a:fld id="{1D8BD707-D9CF-40AE-B4C6-C98DA3205C09}" type="datetimeFigureOut">
               <a:rPr lang="en-US" smtClean="0"/>
               <a:pPr/>
-              <a:t>7/6/2026</a:t>
+              <a:t>7/8/2026</a:t>
             </a:fld>
             <a:endParaRPr lang="en-US"/>
           </a:p>
@@ -1991,7 +1990,7 @@
             <a:fld id="{1D8BD707-D9CF-40AE-B4C6-C98DA3205C09}" type="datetimeFigureOut">
               <a:rPr lang="en-US" smtClean="0"/>
               <a:pPr/>
-              <a:t>7/6/2026</a:t>
+              <a:t>7/8/2026</a:t>
             </a:fld>
             <a:endParaRPr lang="en-US"/>
           </a:p>
@@ -2263,7 +2262,7 @@
             <a:fld id="{1D8BD707-D9CF-40AE-B4C6-C98DA3205C09}" type="datetimeFigureOut">
               <a:rPr lang="en-US" smtClean="0"/>
               <a:pPr/>
-              <a:t>7/6/2026</a:t>
+              <a:t>7/8/2026</a:t>
             </a:fld>
             <a:endParaRPr lang="en-US"/>
           </a:p>
@@ -2512,7 +2511,7 @@
             <a:fld id="{1D8BD707-D9CF-40AE-B4C6-C98DA3205C09}" type="datetimeFigureOut">
               <a:rPr lang="en-US" smtClean="0"/>
               <a:pPr/>
-              <a:t>7/6/2026</a:t>
+              <a:t>7/8/2026</a:t>
             </a:fld>
             <a:endParaRPr lang="en-US"/>
           </a:p>
@@ -2720,7 +2719,7 @@
             <a:fld id="{1D8BD707-D9CF-40AE-B4C6-C98DA3205C09}" type="datetimeFigureOut">
               <a:rPr lang="en-US" smtClean="0"/>
               <a:pPr/>
-              <a:t>7/6/2026</a:t>
+              <a:t>7/8/2026</a:t>
             </a:fld>
             <a:endParaRPr lang="en-US"/>
           </a:p>
@@ -3665,152 +3664,14 @@
       </p:sp>
       <p:sp>
         <p:nvSpPr>
-          <p:cNvPr id="3" name="Freeform 3"/>
-          <p:cNvSpPr/>
-          <p:nvPr/>
-        </p:nvSpPr>
-        <p:spPr>
-          <a:xfrm>
-            <a:off x="1657982" y="647048"/>
-            <a:ext cx="6718839" cy="3837670"/>
-          </a:xfrm>
-          <a:custGeom>
-            <a:avLst/>
-            <a:gdLst/>
-            <a:ahLst/>
-            <a:cxnLst/>
-            <a:rect l="l" t="t" r="r" b="b"/>
-            <a:pathLst>
-              <a:path w="6718839" h="3837670">
-                <a:moveTo>
-                  <a:pt x="0" y="0"/>
-                </a:moveTo>
-                <a:lnTo>
-                  <a:pt x="6718839" y="0"/>
-                </a:lnTo>
-                <a:lnTo>
-                  <a:pt x="6718839" y="3837670"/>
-                </a:lnTo>
-                <a:lnTo>
-                  <a:pt x="0" y="3837670"/>
-                </a:lnTo>
-                <a:lnTo>
-                  <a:pt x="0" y="0"/>
-                </a:lnTo>
-                <a:close/>
-              </a:path>
-            </a:pathLst>
-          </a:custGeom>
-          <a:blipFill>
-            <a:blip r:embed="rId3"/>
-            <a:stretch>
-              <a:fillRect/>
-            </a:stretch>
-          </a:blipFill>
-        </p:spPr>
-      </p:sp>
-      <p:sp>
-        <p:nvSpPr>
-          <p:cNvPr id="4" name="Freeform 4"/>
-          <p:cNvSpPr/>
-          <p:nvPr/>
-        </p:nvSpPr>
-        <p:spPr>
-          <a:xfrm>
-            <a:off x="10040258" y="631124"/>
-            <a:ext cx="6560713" cy="3893295"/>
-          </a:xfrm>
-          <a:custGeom>
-            <a:avLst/>
-            <a:gdLst/>
-            <a:ahLst/>
-            <a:cxnLst/>
-            <a:rect l="l" t="t" r="r" b="b"/>
-            <a:pathLst>
-              <a:path w="6560713" h="3893295">
-                <a:moveTo>
-                  <a:pt x="0" y="0"/>
-                </a:moveTo>
-                <a:lnTo>
-                  <a:pt x="6560713" y="0"/>
-                </a:lnTo>
-                <a:lnTo>
-                  <a:pt x="6560713" y="3893295"/>
-                </a:lnTo>
-                <a:lnTo>
-                  <a:pt x="0" y="3893295"/>
-                </a:lnTo>
-                <a:lnTo>
-                  <a:pt x="0" y="0"/>
-                </a:lnTo>
-                <a:close/>
-              </a:path>
-            </a:pathLst>
-          </a:custGeom>
-          <a:blipFill>
-            <a:blip r:embed="rId4"/>
-            <a:stretch>
-              <a:fillRect/>
-            </a:stretch>
-          </a:blipFill>
-        </p:spPr>
-      </p:sp>
-      <p:sp>
-        <p:nvSpPr>
-          <p:cNvPr id="5" name="Freeform 5"/>
-          <p:cNvSpPr/>
-          <p:nvPr/>
-        </p:nvSpPr>
-        <p:spPr>
-          <a:xfrm>
-            <a:off x="5527574" y="5468045"/>
-            <a:ext cx="6750208" cy="3397986"/>
-          </a:xfrm>
-          <a:custGeom>
-            <a:avLst/>
-            <a:gdLst/>
-            <a:ahLst/>
-            <a:cxnLst/>
-            <a:rect l="l" t="t" r="r" b="b"/>
-            <a:pathLst>
-              <a:path w="6750208" h="3397986">
-                <a:moveTo>
-                  <a:pt x="0" y="0"/>
-                </a:moveTo>
-                <a:lnTo>
-                  <a:pt x="6750207" y="0"/>
-                </a:lnTo>
-                <a:lnTo>
-                  <a:pt x="6750207" y="3397986"/>
-                </a:lnTo>
-                <a:lnTo>
-                  <a:pt x="0" y="3397986"/>
-                </a:lnTo>
-                <a:lnTo>
-                  <a:pt x="0" y="0"/>
-                </a:lnTo>
-                <a:close/>
-              </a:path>
-            </a:pathLst>
-          </a:custGeom>
-          <a:blipFill>
-            <a:blip r:embed="rId5"/>
-            <a:stretch>
-              <a:fillRect/>
-            </a:stretch>
-          </a:blipFill>
-        </p:spPr>
-      </p:sp>
-      <p:sp>
-        <p:nvSpPr>
-          <p:cNvPr id="6" name="TextBox 6"/>
+          <p:cNvPr id="8" name="TextBox 8"/>
           <p:cNvSpPr txBox="1"/>
           <p:nvPr/>
         </p:nvSpPr>
         <p:spPr>
           <a:xfrm>
-            <a:off x="3081440" y="4762795"/>
-            <a:ext cx="3207544" cy="476250"/>
+            <a:off x="7239000" y="7234391"/>
+            <a:ext cx="3439120" cy="484556"/>
           </a:xfrm>
           <a:prstGeom prst="rect">
             <a:avLst/>
@@ -3831,112 +3692,236 @@
               </a:spcBef>
             </a:pPr>
             <a:r>
-              <a:rPr lang="en-US" sz="2400">
-                <a:solidFill>
-                  <a:srgbClr val="000000"/>
-                </a:solidFill>
-                <a:latin typeface="DM Serif Display"/>
-                <a:ea typeface="DM Serif Display"/>
-                <a:cs typeface="DM Serif Display"/>
-                <a:sym typeface="DM Serif Display"/>
-              </a:rPr>
-              <a:t>Hình 7. Kho nguyên liệu</a:t>
-            </a:r>
-          </a:p>
-        </p:txBody>
-      </p:sp>
-      <p:sp>
-        <p:nvSpPr>
-          <p:cNvPr id="7" name="TextBox 7"/>
+              <a:rPr lang="en-US" sz="2400" dirty="0" err="1">
+                <a:solidFill>
+                  <a:srgbClr val="000000"/>
+                </a:solidFill>
+                <a:latin typeface="DM Serif Display"/>
+                <a:ea typeface="DM Serif Display"/>
+                <a:cs typeface="DM Serif Display"/>
+                <a:sym typeface="DM Serif Display"/>
+              </a:rPr>
+              <a:t>Hình</a:t>
+            </a:r>
+            <a:r>
+              <a:rPr lang="en-US" sz="2400" dirty="0">
+                <a:solidFill>
+                  <a:srgbClr val="000000"/>
+                </a:solidFill>
+                <a:latin typeface="DM Serif Display"/>
+                <a:ea typeface="DM Serif Display"/>
+                <a:cs typeface="DM Serif Display"/>
+                <a:sym typeface="DM Serif Display"/>
+              </a:rPr>
+              <a:t> 1. </a:t>
+            </a:r>
+            <a:r>
+              <a:rPr lang="en-US" sz="2400" dirty="0" err="1">
+                <a:solidFill>
+                  <a:srgbClr val="000000"/>
+                </a:solidFill>
+                <a:latin typeface="DM Serif Display"/>
+                <a:ea typeface="DM Serif Display"/>
+                <a:cs typeface="DM Serif Display"/>
+                <a:sym typeface="DM Serif Display"/>
+              </a:rPr>
+              <a:t>Gọi</a:t>
+            </a:r>
+            <a:r>
+              <a:rPr lang="en-US" sz="2400" dirty="0">
+                <a:solidFill>
+                  <a:srgbClr val="000000"/>
+                </a:solidFill>
+                <a:latin typeface="DM Serif Display"/>
+                <a:ea typeface="DM Serif Display"/>
+                <a:cs typeface="DM Serif Display"/>
+                <a:sym typeface="DM Serif Display"/>
+              </a:rPr>
+              <a:t> </a:t>
+            </a:r>
+            <a:r>
+              <a:rPr lang="en-US" sz="2400" dirty="0" err="1">
+                <a:solidFill>
+                  <a:srgbClr val="000000"/>
+                </a:solidFill>
+                <a:latin typeface="DM Serif Display"/>
+                <a:ea typeface="DM Serif Display"/>
+                <a:cs typeface="DM Serif Display"/>
+                <a:sym typeface="DM Serif Display"/>
+              </a:rPr>
+              <a:t>món</a:t>
+            </a:r>
+            <a:r>
+              <a:rPr lang="en-US" sz="2400" dirty="0">
+                <a:solidFill>
+                  <a:srgbClr val="000000"/>
+                </a:solidFill>
+                <a:latin typeface="DM Serif Display"/>
+                <a:ea typeface="DM Serif Display"/>
+                <a:cs typeface="DM Serif Display"/>
+                <a:sym typeface="DM Serif Display"/>
+              </a:rPr>
+              <a:t> POS</a:t>
+            </a:r>
+          </a:p>
+        </p:txBody>
+      </p:sp>
+      <p:sp>
+        <p:nvSpPr>
+          <p:cNvPr id="9" name="TextBox 8">
+            <a:extLst>
+              <a:ext uri="{FF2B5EF4-FFF2-40B4-BE49-F238E27FC236}">
+                <a16:creationId xmlns:a16="http://schemas.microsoft.com/office/drawing/2014/main" id="{E24CB3EF-088C-D4EA-E370-BFBE8390F010}"/>
+              </a:ext>
+            </a:extLst>
+          </p:cNvPr>
           <p:cNvSpPr txBox="1"/>
           <p:nvPr/>
         </p:nvSpPr>
         <p:spPr>
           <a:xfrm>
-            <a:off x="12025728" y="4696520"/>
-            <a:ext cx="3408908" cy="476250"/>
+            <a:off x="1600200" y="975266"/>
+            <a:ext cx="7543800" cy="707886"/>
           </a:xfrm>
           <a:prstGeom prst="rect">
             <a:avLst/>
           </a:prstGeom>
-        </p:spPr>
-        <p:txBody>
-          <a:bodyPr lIns="0" tIns="0" rIns="0" bIns="0" rtlCol="0" anchor="t">
+          <a:noFill/>
+        </p:spPr>
+        <p:txBody>
+          <a:bodyPr wrap="square" rtlCol="0">
             <a:spAutoFit/>
           </a:bodyPr>
           <a:lstStyle/>
           <a:p>
-            <a:pPr algn="ctr">
-              <a:lnSpc>
-                <a:spcPts val="4079"/>
-              </a:lnSpc>
-              <a:spcBef>
-                <a:spcPct val="0"/>
-              </a:spcBef>
-            </a:pPr>
-            <a:r>
-              <a:rPr lang="en-US" sz="2400">
-                <a:solidFill>
-                  <a:srgbClr val="000000"/>
-                </a:solidFill>
-                <a:latin typeface="DM Serif Display"/>
-                <a:ea typeface="DM Serif Display"/>
-                <a:cs typeface="DM Serif Display"/>
-                <a:sym typeface="DM Serif Display"/>
-              </a:rPr>
-              <a:t>Hình 8. Quản lí danh mục</a:t>
-            </a:r>
-          </a:p>
-        </p:txBody>
-      </p:sp>
-      <p:sp>
-        <p:nvSpPr>
-          <p:cNvPr id="8" name="TextBox 8"/>
-          <p:cNvSpPr txBox="1"/>
+            <a:r>
+              <a:rPr lang="en-US" sz="4000" dirty="0">
+                <a:solidFill>
+                  <a:srgbClr val="000000"/>
+                </a:solidFill>
+                <a:latin typeface="DM Serif Display"/>
+                <a:ea typeface="DM Serif Display"/>
+                <a:cs typeface="DM Serif Display"/>
+                <a:sym typeface="DM Serif Display"/>
+              </a:rPr>
+              <a:t>2.  </a:t>
+            </a:r>
+            <a:r>
+              <a:rPr lang="en-US" sz="4000" dirty="0" err="1">
+                <a:solidFill>
+                  <a:srgbClr val="000000"/>
+                </a:solidFill>
+                <a:latin typeface="DM Serif Display"/>
+                <a:ea typeface="DM Serif Display"/>
+                <a:cs typeface="DM Serif Display"/>
+                <a:sym typeface="DM Serif Display"/>
+              </a:rPr>
+              <a:t>Tài</a:t>
+            </a:r>
+            <a:r>
+              <a:rPr lang="en-US" sz="4000" dirty="0">
+                <a:solidFill>
+                  <a:srgbClr val="000000"/>
+                </a:solidFill>
+                <a:latin typeface="DM Serif Display"/>
+                <a:ea typeface="DM Serif Display"/>
+                <a:cs typeface="DM Serif Display"/>
+                <a:sym typeface="DM Serif Display"/>
+              </a:rPr>
+              <a:t> </a:t>
+            </a:r>
+            <a:r>
+              <a:rPr lang="en-US" sz="4000" dirty="0" err="1">
+                <a:solidFill>
+                  <a:srgbClr val="000000"/>
+                </a:solidFill>
+                <a:latin typeface="DM Serif Display"/>
+                <a:ea typeface="DM Serif Display"/>
+                <a:cs typeface="DM Serif Display"/>
+                <a:sym typeface="DM Serif Display"/>
+              </a:rPr>
+              <a:t>khoản</a:t>
+            </a:r>
+            <a:r>
+              <a:rPr lang="en-US" sz="4000" dirty="0">
+                <a:solidFill>
+                  <a:srgbClr val="000000"/>
+                </a:solidFill>
+                <a:latin typeface="DM Serif Display"/>
+                <a:ea typeface="DM Serif Display"/>
+                <a:cs typeface="DM Serif Display"/>
+                <a:sym typeface="DM Serif Display"/>
+              </a:rPr>
+              <a:t> Staff(Thu </a:t>
+            </a:r>
+            <a:r>
+              <a:rPr lang="en-US" sz="4000" dirty="0" err="1">
+                <a:solidFill>
+                  <a:srgbClr val="000000"/>
+                </a:solidFill>
+                <a:latin typeface="DM Serif Display"/>
+                <a:ea typeface="DM Serif Display"/>
+                <a:cs typeface="DM Serif Display"/>
+                <a:sym typeface="DM Serif Display"/>
+              </a:rPr>
+              <a:t>Ngân</a:t>
+            </a:r>
+            <a:r>
+              <a:rPr lang="en-US" sz="4000" dirty="0">
+                <a:solidFill>
+                  <a:srgbClr val="000000"/>
+                </a:solidFill>
+                <a:latin typeface="DM Serif Display"/>
+                <a:ea typeface="DM Serif Display"/>
+                <a:cs typeface="DM Serif Display"/>
+                <a:sym typeface="DM Serif Display"/>
+              </a:rPr>
+              <a:t>):</a:t>
+            </a:r>
+            <a:endParaRPr lang="en-US" sz="4000" dirty="0"/>
+          </a:p>
+        </p:txBody>
+      </p:sp>
+      <p:pic>
+        <p:nvPicPr>
+          <p:cNvPr id="11" name="Picture 10" descr="A screenshot of a computer&#10;&#10;AI-generated content may be incorrect.">
+            <a:extLst>
+              <a:ext uri="{FF2B5EF4-FFF2-40B4-BE49-F238E27FC236}">
+                <a16:creationId xmlns:a16="http://schemas.microsoft.com/office/drawing/2014/main" id="{91FA0B12-C68B-D9FD-0949-1647702C00FC}"/>
+              </a:ext>
+            </a:extLst>
+          </p:cNvPr>
+          <p:cNvPicPr>
+            <a:picLocks noChangeAspect="1"/>
+          </p:cNvPicPr>
           <p:nvPr/>
-        </p:nvSpPr>
-        <p:spPr>
-          <a:xfrm>
-            <a:off x="6928569" y="9057182"/>
-            <a:ext cx="3439120" cy="476250"/>
+        </p:nvPicPr>
+        <p:blipFill>
+          <a:blip r:embed="rId3">
+            <a:extLst>
+              <a:ext uri="{28A0092B-C50C-407E-A947-70E740481C1C}">
+                <a14:useLocalDpi xmlns:a14="http://schemas.microsoft.com/office/drawing/2010/main" val="0"/>
+              </a:ext>
+            </a:extLst>
+          </a:blip>
+          <a:stretch>
+            <a:fillRect/>
+          </a:stretch>
+        </p:blipFill>
+        <p:spPr>
+          <a:xfrm>
+            <a:off x="4343400" y="2305050"/>
+            <a:ext cx="9601200" cy="4545568"/>
           </a:xfrm>
           <a:prstGeom prst="rect">
             <a:avLst/>
           </a:prstGeom>
         </p:spPr>
-        <p:txBody>
-          <a:bodyPr lIns="0" tIns="0" rIns="0" bIns="0" rtlCol="0" anchor="t">
-            <a:spAutoFit/>
-          </a:bodyPr>
-          <a:lstStyle/>
-          <a:p>
-            <a:pPr algn="ctr">
-              <a:lnSpc>
-                <a:spcPts val="4079"/>
-              </a:lnSpc>
-              <a:spcBef>
-                <a:spcPct val="0"/>
-              </a:spcBef>
-            </a:pPr>
-            <a:r>
-              <a:rPr lang="en-US" sz="2400">
-                <a:solidFill>
-                  <a:srgbClr val="000000"/>
-                </a:solidFill>
-                <a:latin typeface="DM Serif Display"/>
-                <a:ea typeface="DM Serif Display"/>
-                <a:cs typeface="DM Serif Display"/>
-                <a:sym typeface="DM Serif Display"/>
-              </a:rPr>
-              <a:t>Hình 9. Quản lí doanh thu</a:t>
-            </a:r>
-          </a:p>
-        </p:txBody>
-      </p:sp>
+      </p:pic>
     </p:spTree>
     <p:extLst>
       <p:ext uri="{BB962C8B-B14F-4D97-AF65-F5344CB8AC3E}">
-        <p14:creationId xmlns:p14="http://schemas.microsoft.com/office/powerpoint/2010/main" val="2635000450"/>
+        <p14:creationId xmlns:p14="http://schemas.microsoft.com/office/powerpoint/2010/main" val="1312085144"/>
       </p:ext>
     </p:extLst>
   </p:cSld>
@@ -4013,14 +3998,60 @@
       </p:sp>
       <p:sp>
         <p:nvSpPr>
-          <p:cNvPr id="8" name="TextBox 8"/>
+          <p:cNvPr id="3" name="Freeform 3"/>
+          <p:cNvSpPr/>
+          <p:nvPr/>
+        </p:nvSpPr>
+        <p:spPr>
+          <a:xfrm>
+            <a:off x="4430650" y="1214898"/>
+            <a:ext cx="8638196" cy="8745917"/>
+          </a:xfrm>
+          <a:custGeom>
+            <a:avLst/>
+            <a:gdLst/>
+            <a:ahLst/>
+            <a:cxnLst/>
+            <a:rect l="l" t="t" r="r" b="b"/>
+            <a:pathLst>
+              <a:path w="8638196" h="8745917">
+                <a:moveTo>
+                  <a:pt x="0" y="0"/>
+                </a:moveTo>
+                <a:lnTo>
+                  <a:pt x="8638196" y="0"/>
+                </a:lnTo>
+                <a:lnTo>
+                  <a:pt x="8638196" y="8745917"/>
+                </a:lnTo>
+                <a:lnTo>
+                  <a:pt x="0" y="8745917"/>
+                </a:lnTo>
+                <a:lnTo>
+                  <a:pt x="0" y="0"/>
+                </a:lnTo>
+                <a:close/>
+              </a:path>
+            </a:pathLst>
+          </a:custGeom>
+          <a:blipFill>
+            <a:blip r:embed="rId3"/>
+            <a:stretch>
+              <a:fillRect r="-843"/>
+            </a:stretch>
+          </a:blipFill>
+        </p:spPr>
+      </p:sp>
+      <p:sp>
+        <p:nvSpPr>
+          <p:cNvPr id="4" name="TextBox 4"/>
           <p:cNvSpPr txBox="1"/>
           <p:nvPr/>
         </p:nvSpPr>
         <p:spPr>
           <a:xfrm>
-            <a:off x="7239000" y="7234391"/>
-            <a:ext cx="3439120" cy="484556"/>
+            <a:off x="-641793" y="236058"/>
+            <a:ext cx="9316373" cy="778510"/>
           </a:xfrm>
           <a:prstGeom prst="rect">
             <a:avLst/>
@@ -4034,245 +4065,25 @@
           <a:p>
             <a:pPr algn="ctr">
               <a:lnSpc>
-                <a:spcPts val="4079"/>
-              </a:lnSpc>
-              <a:spcBef>
-                <a:spcPct val="0"/>
-              </a:spcBef>
-            </a:pPr>
-            <a:r>
-              <a:rPr lang="en-US" sz="2400" dirty="0" err="1">
-                <a:solidFill>
-                  <a:srgbClr val="000000"/>
-                </a:solidFill>
-                <a:latin typeface="DM Serif Display"/>
-                <a:ea typeface="DM Serif Display"/>
-                <a:cs typeface="DM Serif Display"/>
-                <a:sym typeface="DM Serif Display"/>
-              </a:rPr>
-              <a:t>Hình</a:t>
-            </a:r>
-            <a:r>
-              <a:rPr lang="en-US" sz="2400" dirty="0">
-                <a:solidFill>
-                  <a:srgbClr val="000000"/>
-                </a:solidFill>
-                <a:latin typeface="DM Serif Display"/>
-                <a:ea typeface="DM Serif Display"/>
-                <a:cs typeface="DM Serif Display"/>
-                <a:sym typeface="DM Serif Display"/>
-              </a:rPr>
-              <a:t> 1. </a:t>
-            </a:r>
-            <a:r>
-              <a:rPr lang="en-US" sz="2400" dirty="0" err="1">
-                <a:solidFill>
-                  <a:srgbClr val="000000"/>
-                </a:solidFill>
-                <a:latin typeface="DM Serif Display"/>
-                <a:ea typeface="DM Serif Display"/>
-                <a:cs typeface="DM Serif Display"/>
-                <a:sym typeface="DM Serif Display"/>
-              </a:rPr>
-              <a:t>Gọi</a:t>
-            </a:r>
-            <a:r>
-              <a:rPr lang="en-US" sz="2400" dirty="0">
-                <a:solidFill>
-                  <a:srgbClr val="000000"/>
-                </a:solidFill>
-                <a:latin typeface="DM Serif Display"/>
-                <a:ea typeface="DM Serif Display"/>
-                <a:cs typeface="DM Serif Display"/>
-                <a:sym typeface="DM Serif Display"/>
-              </a:rPr>
-              <a:t> </a:t>
-            </a:r>
-            <a:r>
-              <a:rPr lang="en-US" sz="2400" dirty="0" err="1">
-                <a:solidFill>
-                  <a:srgbClr val="000000"/>
-                </a:solidFill>
-                <a:latin typeface="DM Serif Display"/>
-                <a:ea typeface="DM Serif Display"/>
-                <a:cs typeface="DM Serif Display"/>
-                <a:sym typeface="DM Serif Display"/>
-              </a:rPr>
-              <a:t>món</a:t>
-            </a:r>
-            <a:r>
-              <a:rPr lang="en-US" sz="2400" dirty="0">
-                <a:solidFill>
-                  <a:srgbClr val="000000"/>
-                </a:solidFill>
-                <a:latin typeface="DM Serif Display"/>
-                <a:ea typeface="DM Serif Display"/>
-                <a:cs typeface="DM Serif Display"/>
-                <a:sym typeface="DM Serif Display"/>
-              </a:rPr>
-              <a:t> POS</a:t>
-            </a:r>
-          </a:p>
-        </p:txBody>
-      </p:sp>
-      <p:sp>
-        <p:nvSpPr>
-          <p:cNvPr id="9" name="TextBox 8">
-            <a:extLst>
-              <a:ext uri="{FF2B5EF4-FFF2-40B4-BE49-F238E27FC236}">
-                <a16:creationId xmlns:a16="http://schemas.microsoft.com/office/drawing/2014/main" id="{E24CB3EF-088C-D4EA-E370-BFBE8390F010}"/>
-              </a:ext>
-            </a:extLst>
-          </p:cNvPr>
-          <p:cNvSpPr txBox="1"/>
-          <p:nvPr/>
-        </p:nvSpPr>
-        <p:spPr>
-          <a:xfrm>
-            <a:off x="1600200" y="975266"/>
-            <a:ext cx="7543800" cy="707886"/>
-          </a:xfrm>
-          <a:prstGeom prst="rect">
-            <a:avLst/>
-          </a:prstGeom>
-          <a:noFill/>
-        </p:spPr>
-        <p:txBody>
-          <a:bodyPr wrap="square" rtlCol="0">
-            <a:spAutoFit/>
-          </a:bodyPr>
-          <a:lstStyle/>
-          <a:p>
-            <a:r>
-              <a:rPr lang="en-US" sz="4000" dirty="0">
-                <a:solidFill>
-                  <a:srgbClr val="000000"/>
-                </a:solidFill>
-                <a:latin typeface="DM Serif Display"/>
-                <a:ea typeface="DM Serif Display"/>
-                <a:cs typeface="DM Serif Display"/>
-                <a:sym typeface="DM Serif Display"/>
-              </a:rPr>
-              <a:t>2.  </a:t>
-            </a:r>
-            <a:r>
-              <a:rPr lang="en-US" sz="4000" dirty="0" err="1">
-                <a:solidFill>
-                  <a:srgbClr val="000000"/>
-                </a:solidFill>
-                <a:latin typeface="DM Serif Display"/>
-                <a:ea typeface="DM Serif Display"/>
-                <a:cs typeface="DM Serif Display"/>
-                <a:sym typeface="DM Serif Display"/>
-              </a:rPr>
-              <a:t>Tài</a:t>
-            </a:r>
-            <a:r>
-              <a:rPr lang="en-US" sz="4000" dirty="0">
-                <a:solidFill>
-                  <a:srgbClr val="000000"/>
-                </a:solidFill>
-                <a:latin typeface="DM Serif Display"/>
-                <a:ea typeface="DM Serif Display"/>
-                <a:cs typeface="DM Serif Display"/>
-                <a:sym typeface="DM Serif Display"/>
-              </a:rPr>
-              <a:t> </a:t>
-            </a:r>
-            <a:r>
-              <a:rPr lang="en-US" sz="4000" dirty="0" err="1">
-                <a:solidFill>
-                  <a:srgbClr val="000000"/>
-                </a:solidFill>
-                <a:latin typeface="DM Serif Display"/>
-                <a:ea typeface="DM Serif Display"/>
-                <a:cs typeface="DM Serif Display"/>
-                <a:sym typeface="DM Serif Display"/>
-              </a:rPr>
-              <a:t>khoản</a:t>
-            </a:r>
-            <a:r>
-              <a:rPr lang="en-US" sz="4000" dirty="0">
-                <a:solidFill>
-                  <a:srgbClr val="000000"/>
-                </a:solidFill>
-                <a:latin typeface="DM Serif Display"/>
-                <a:ea typeface="DM Serif Display"/>
-                <a:cs typeface="DM Serif Display"/>
-                <a:sym typeface="DM Serif Display"/>
-              </a:rPr>
-              <a:t> Staff(Thu </a:t>
-            </a:r>
-            <a:r>
-              <a:rPr lang="en-US" sz="4000" dirty="0" err="1">
-                <a:solidFill>
-                  <a:srgbClr val="000000"/>
-                </a:solidFill>
-                <a:latin typeface="DM Serif Display"/>
-                <a:ea typeface="DM Serif Display"/>
-                <a:cs typeface="DM Serif Display"/>
-                <a:sym typeface="DM Serif Display"/>
-              </a:rPr>
-              <a:t>Ngân</a:t>
-            </a:r>
-            <a:r>
-              <a:rPr lang="en-US" sz="4000" dirty="0">
-                <a:solidFill>
-                  <a:srgbClr val="000000"/>
-                </a:solidFill>
-                <a:latin typeface="DM Serif Display"/>
-                <a:ea typeface="DM Serif Display"/>
-                <a:cs typeface="DM Serif Display"/>
-                <a:sym typeface="DM Serif Display"/>
-              </a:rPr>
-              <a:t>):</a:t>
-            </a:r>
-            <a:endParaRPr lang="en-US" sz="4000" dirty="0"/>
-          </a:p>
-        </p:txBody>
-      </p:sp>
-      <p:pic>
-        <p:nvPicPr>
-          <p:cNvPr id="11" name="Picture 10" descr="A screenshot of a computer&#10;&#10;AI-generated content may be incorrect.">
-            <a:extLst>
-              <a:ext uri="{FF2B5EF4-FFF2-40B4-BE49-F238E27FC236}">
-                <a16:creationId xmlns:a16="http://schemas.microsoft.com/office/drawing/2014/main" id="{91FA0B12-C68B-D9FD-0949-1647702C00FC}"/>
-              </a:ext>
-            </a:extLst>
-          </p:cNvPr>
-          <p:cNvPicPr>
-            <a:picLocks noChangeAspect="1"/>
-          </p:cNvPicPr>
-          <p:nvPr/>
-        </p:nvPicPr>
-        <p:blipFill>
-          <a:blip r:embed="rId3">
-            <a:extLst>
-              <a:ext uri="{28A0092B-C50C-407E-A947-70E740481C1C}">
-                <a14:useLocalDpi xmlns:a14="http://schemas.microsoft.com/office/drawing/2010/main" val="0"/>
-              </a:ext>
-            </a:extLst>
-          </a:blip>
-          <a:stretch>
-            <a:fillRect/>
-          </a:stretch>
-        </p:blipFill>
-        <p:spPr>
-          <a:xfrm>
-            <a:off x="4343400" y="2305050"/>
-            <a:ext cx="9601200" cy="4545568"/>
-          </a:xfrm>
-          <a:prstGeom prst="rect">
-            <a:avLst/>
-          </a:prstGeom>
-        </p:spPr>
-      </p:pic>
+                <a:spcPts val="6439"/>
+              </a:lnSpc>
+            </a:pPr>
+            <a:r>
+              <a:rPr lang="en-US" sz="4599">
+                <a:solidFill>
+                  <a:srgbClr val="000000"/>
+                </a:solidFill>
+                <a:latin typeface="DM Serif Display"/>
+                <a:ea typeface="DM Serif Display"/>
+                <a:cs typeface="DM Serif Display"/>
+                <a:sym typeface="DM Serif Display"/>
+              </a:rPr>
+              <a:t>VII. Phân công công việc</a:t>
+            </a:r>
+          </a:p>
+        </p:txBody>
+      </p:sp>
     </p:spTree>
-    <p:extLst>
-      <p:ext uri="{BB962C8B-B14F-4D97-AF65-F5344CB8AC3E}">
-        <p14:creationId xmlns:p14="http://schemas.microsoft.com/office/powerpoint/2010/main" val="1312085144"/>
-      </p:ext>
-    </p:extLst>
   </p:cSld>
   <p:clrMapOvr>
     <a:masterClrMapping/>
@@ -4347,59 +4158,13 @@
       </p:sp>
       <p:sp>
         <p:nvSpPr>
-          <p:cNvPr id="3" name="Freeform 3"/>
-          <p:cNvSpPr/>
-          <p:nvPr/>
-        </p:nvSpPr>
-        <p:spPr>
-          <a:xfrm>
-            <a:off x="4430650" y="1214898"/>
-            <a:ext cx="8638196" cy="8745917"/>
-          </a:xfrm>
-          <a:custGeom>
-            <a:avLst/>
-            <a:gdLst/>
-            <a:ahLst/>
-            <a:cxnLst/>
-            <a:rect l="l" t="t" r="r" b="b"/>
-            <a:pathLst>
-              <a:path w="8638196" h="8745917">
-                <a:moveTo>
-                  <a:pt x="0" y="0"/>
-                </a:moveTo>
-                <a:lnTo>
-                  <a:pt x="8638196" y="0"/>
-                </a:lnTo>
-                <a:lnTo>
-                  <a:pt x="8638196" y="8745917"/>
-                </a:lnTo>
-                <a:lnTo>
-                  <a:pt x="0" y="8745917"/>
-                </a:lnTo>
-                <a:lnTo>
-                  <a:pt x="0" y="0"/>
-                </a:lnTo>
-                <a:close/>
-              </a:path>
-            </a:pathLst>
-          </a:custGeom>
-          <a:blipFill>
-            <a:blip r:embed="rId3"/>
-            <a:stretch>
-              <a:fillRect r="-843"/>
-            </a:stretch>
-          </a:blipFill>
-        </p:spPr>
-      </p:sp>
-      <p:sp>
-        <p:nvSpPr>
-          <p:cNvPr id="4" name="TextBox 4"/>
+          <p:cNvPr id="3" name="TextBox 3"/>
           <p:cNvSpPr txBox="1"/>
           <p:nvPr/>
         </p:nvSpPr>
         <p:spPr>
           <a:xfrm>
-            <a:off x="-641793" y="236058"/>
+            <a:off x="-928430" y="250190"/>
             <a:ext cx="9316373" cy="778510"/>
           </a:xfrm>
           <a:prstGeom prst="rect">
@@ -4427,7 +4192,95 @@
                 <a:cs typeface="DM Serif Display"/>
                 <a:sym typeface="DM Serif Display"/>
               </a:rPr>
-              <a:t>VII. Phân công công việc</a:t>
+              <a:t>VIII. Kết quả đạt được</a:t>
+            </a:r>
+          </a:p>
+        </p:txBody>
+      </p:sp>
+      <p:sp>
+        <p:nvSpPr>
+          <p:cNvPr id="4" name="TextBox 4"/>
+          <p:cNvSpPr txBox="1"/>
+          <p:nvPr/>
+        </p:nvSpPr>
+        <p:spPr>
+          <a:xfrm>
+            <a:off x="1194318" y="1660568"/>
+            <a:ext cx="16297469" cy="3714750"/>
+          </a:xfrm>
+          <a:prstGeom prst="rect">
+            <a:avLst/>
+          </a:prstGeom>
+        </p:spPr>
+        <p:txBody>
+          <a:bodyPr lIns="0" tIns="0" rIns="0" bIns="0" rtlCol="0" anchor="t">
+            <a:spAutoFit/>
+          </a:bodyPr>
+          <a:lstStyle/>
+          <a:p>
+            <a:pPr algn="l">
+              <a:lnSpc>
+                <a:spcPts val="4200"/>
+              </a:lnSpc>
+              <a:spcBef>
+                <a:spcPct val="0"/>
+              </a:spcBef>
+            </a:pPr>
+            <a:r>
+              <a:rPr lang="en-US" sz="3000">
+                <a:solidFill>
+                  <a:srgbClr val="000000"/>
+                </a:solidFill>
+                <a:latin typeface="DM Serif Display"/>
+                <a:ea typeface="DM Serif Display"/>
+                <a:cs typeface="DM Serif Display"/>
+                <a:sym typeface="DM Serif Display"/>
+              </a:rPr>
+              <a:t>Sau quá trình phân tích, thiết kế và triển khai, nhóm đã xây dựng thành công hệ thống Quản lý Quán Cà Phê Sun Coffee với các chức năng chính như: đăng nhập và phân quyền người dùng (Admin, Staff), quản lý danh mục sản phẩm, quản lý sản phẩm (thêm, sửa, xóa, tìm kiếm), quản lý đơn hàng và hóa đơn bán hàng, tính toán tổng tiền và giảm giá, quản lý nhân viên, quản lý kho nguyên liệu, thống kê doanh thu, tìm kiếm dữ liệu và kết nối cơ sở dữ liệu MySQL thông qua JDBC. Hệ thống được xây dựng theo mô hình MVC với giao diện JSP kết hợp Bootstrap giúp tăng khả năng quản lý và bảo trì. </a:t>
+            </a:r>
+          </a:p>
+        </p:txBody>
+      </p:sp>
+      <p:sp>
+        <p:nvSpPr>
+          <p:cNvPr id="5" name="TextBox 5"/>
+          <p:cNvSpPr txBox="1"/>
+          <p:nvPr/>
+        </p:nvSpPr>
+        <p:spPr>
+          <a:xfrm>
+            <a:off x="1194318" y="6003968"/>
+            <a:ext cx="16631879" cy="2114550"/>
+          </a:xfrm>
+          <a:prstGeom prst="rect">
+            <a:avLst/>
+          </a:prstGeom>
+        </p:spPr>
+        <p:txBody>
+          <a:bodyPr lIns="0" tIns="0" rIns="0" bIns="0" rtlCol="0" anchor="t">
+            <a:spAutoFit/>
+          </a:bodyPr>
+          <a:lstStyle/>
+          <a:p>
+            <a:pPr algn="l">
+              <a:lnSpc>
+                <a:spcPts val="4200"/>
+              </a:lnSpc>
+              <a:spcBef>
+                <a:spcPct val="0"/>
+              </a:spcBef>
+            </a:pPr>
+            <a:r>
+              <a:rPr lang="en-US" sz="3000">
+                <a:solidFill>
+                  <a:srgbClr val="000000"/>
+                </a:solidFill>
+                <a:latin typeface="DM Serif Display"/>
+                <a:ea typeface="DM Serif Display"/>
+                <a:cs typeface="DM Serif Display"/>
+                <a:sym typeface="DM Serif Display"/>
+              </a:rPr>
+              <a:t>Thông qua quá trình thực hiện, các thành viên trong nhóm đã hiểu rõ hơn về quy trình xây dựng một ứng dụng Web từ khâu phân tích yêu cầu, thiết kế cơ sở dữ liệu, xây dựng giao diện đến xử lý nghiệp vụ và kết nối cơ sở dữ liệu. Đề tài giúp nhóm củng cố kiến thức chuyên ngành và nâng cao kỹ năng làm việc nhóm trong quá trình phát triển dự án. </a:t>
             </a:r>
           </a:p>
         </p:txBody>
@@ -4513,7 +4366,7 @@
         </p:nvSpPr>
         <p:spPr>
           <a:xfrm>
-            <a:off x="-928430" y="250190"/>
+            <a:off x="297737" y="443073"/>
             <a:ext cx="9316373" cy="778510"/>
           </a:xfrm>
           <a:prstGeom prst="rect">
@@ -4541,7 +4394,7 @@
                 <a:cs typeface="DM Serif Display"/>
                 <a:sym typeface="DM Serif Display"/>
               </a:rPr>
-              <a:t>VIII. Kết quả đạt được</a:t>
+              <a:t>IX.Hạn chế và hướng phát triển</a:t>
             </a:r>
           </a:p>
         </p:txBody>
@@ -4554,8 +4407,8 @@
         </p:nvSpPr>
         <p:spPr>
           <a:xfrm>
-            <a:off x="1194318" y="1660568"/>
-            <a:ext cx="16297469" cy="3714750"/>
+            <a:off x="1446834" y="1848533"/>
+            <a:ext cx="2240905" cy="646430"/>
           </a:xfrm>
           <a:prstGeom prst="rect">
             <a:avLst/>
@@ -4567,25 +4420,25 @@
           </a:bodyPr>
           <a:lstStyle/>
           <a:p>
-            <a:pPr algn="l">
-              <a:lnSpc>
-                <a:spcPts val="4200"/>
+            <a:pPr algn="ctr">
+              <a:lnSpc>
+                <a:spcPts val="5320"/>
               </a:lnSpc>
               <a:spcBef>
                 <a:spcPct val="0"/>
               </a:spcBef>
             </a:pPr>
             <a:r>
-              <a:rPr lang="en-US" sz="3000">
-                <a:solidFill>
-                  <a:srgbClr val="000000"/>
-                </a:solidFill>
-                <a:latin typeface="DM Serif Display"/>
-                <a:ea typeface="DM Serif Display"/>
-                <a:cs typeface="DM Serif Display"/>
-                <a:sym typeface="DM Serif Display"/>
-              </a:rPr>
-              <a:t>Sau quá trình phân tích, thiết kế và triển khai, nhóm đã xây dựng thành công hệ thống Quản lý Quán Cà Phê Sun Coffee với các chức năng chính như: đăng nhập và phân quyền người dùng (Admin, Staff), quản lý danh mục sản phẩm, quản lý sản phẩm (thêm, sửa, xóa, tìm kiếm), quản lý đơn hàng và hóa đơn bán hàng, tính toán tổng tiền và giảm giá, quản lý nhân viên, quản lý kho nguyên liệu, thống kê doanh thu, tìm kiếm dữ liệu và kết nối cơ sở dữ liệu MySQL thông qua JDBC. Hệ thống được xây dựng theo mô hình MVC với giao diện JSP kết hợp Bootstrap giúp tăng khả năng quản lý và bảo trì. </a:t>
+              <a:rPr lang="en-US" sz="3800">
+                <a:solidFill>
+                  <a:srgbClr val="000000"/>
+                </a:solidFill>
+                <a:latin typeface="DM Serif Display"/>
+                <a:ea typeface="DM Serif Display"/>
+                <a:cs typeface="DM Serif Display"/>
+                <a:sym typeface="DM Serif Display"/>
+              </a:rPr>
+              <a:t>a. Hạn chế</a:t>
             </a:r>
           </a:p>
         </p:txBody>
@@ -4598,8 +4451,8 @@
         </p:nvSpPr>
         <p:spPr>
           <a:xfrm>
-            <a:off x="1194318" y="6003968"/>
-            <a:ext cx="16631879" cy="2114550"/>
+            <a:off x="1831633" y="3142663"/>
+            <a:ext cx="15996644" cy="4771390"/>
           </a:xfrm>
           <a:prstGeom prst="rect">
             <a:avLst/>
@@ -4613,23 +4466,134 @@
           <a:p>
             <a:pPr algn="l">
               <a:lnSpc>
-                <a:spcPts val="4200"/>
+                <a:spcPts val="4759"/>
               </a:lnSpc>
               <a:spcBef>
                 <a:spcPct val="0"/>
               </a:spcBef>
             </a:pPr>
             <a:r>
-              <a:rPr lang="en-US" sz="3000">
-                <a:solidFill>
-                  <a:srgbClr val="000000"/>
-                </a:solidFill>
-                <a:latin typeface="DM Serif Display"/>
-                <a:ea typeface="DM Serif Display"/>
-                <a:cs typeface="DM Serif Display"/>
-                <a:sym typeface="DM Serif Display"/>
-              </a:rPr>
-              <a:t>Thông qua quá trình thực hiện, các thành viên trong nhóm đã hiểu rõ hơn về quy trình xây dựng một ứng dụng Web từ khâu phân tích yêu cầu, thiết kế cơ sở dữ liệu, xây dựng giao diện đến xử lý nghiệp vụ và kết nối cơ sở dữ liệu. Đề tài giúp nhóm củng cố kiến thức chuyên ngành và nâng cao kỹ năng làm việc nhóm trong quá trình phát triển dự án. </a:t>
+              <a:rPr lang="en-US" sz="3399">
+                <a:solidFill>
+                  <a:srgbClr val="000000"/>
+                </a:solidFill>
+                <a:latin typeface="DM Serif Display"/>
+                <a:ea typeface="DM Serif Display"/>
+                <a:cs typeface="DM Serif Display"/>
+                <a:sym typeface="DM Serif Display"/>
+              </a:rPr>
+              <a:t>Bên cạnh những kết quả đạt được, hệ thống vẫn còn một số hạn chế như : </a:t>
+            </a:r>
+          </a:p>
+          <a:p>
+            <a:pPr algn="l">
+              <a:lnSpc>
+                <a:spcPts val="4759"/>
+              </a:lnSpc>
+              <a:spcBef>
+                <a:spcPct val="0"/>
+              </a:spcBef>
+            </a:pPr>
+            <a:endParaRPr lang="en-US" sz="3399">
+              <a:solidFill>
+                <a:srgbClr val="000000"/>
+              </a:solidFill>
+              <a:latin typeface="DM Serif Display"/>
+              <a:ea typeface="DM Serif Display"/>
+              <a:cs typeface="DM Serif Display"/>
+              <a:sym typeface="DM Serif Display"/>
+            </a:endParaRPr>
+          </a:p>
+          <a:p>
+            <a:pPr marL="734059" lvl="1" indent="-367030" algn="l">
+              <a:lnSpc>
+                <a:spcPts val="4759"/>
+              </a:lnSpc>
+              <a:spcBef>
+                <a:spcPct val="0"/>
+              </a:spcBef>
+              <a:buFont typeface="Arial"/>
+              <a:buChar char="•"/>
+            </a:pPr>
+            <a:r>
+              <a:rPr lang="en-US" sz="3399">
+                <a:solidFill>
+                  <a:srgbClr val="000000"/>
+                </a:solidFill>
+                <a:latin typeface="DM Serif Display"/>
+                <a:ea typeface="DM Serif Display"/>
+                <a:cs typeface="DM Serif Display"/>
+                <a:sym typeface="DM Serif Display"/>
+              </a:rPr>
+              <a:t>Chưa hỗ trợ đặt hàng online từ phía khách hàng</a:t>
+            </a:r>
+          </a:p>
+          <a:p>
+            <a:pPr marL="734059" lvl="1" indent="-367030" algn="l">
+              <a:lnSpc>
+                <a:spcPts val="4759"/>
+              </a:lnSpc>
+              <a:spcBef>
+                <a:spcPct val="0"/>
+              </a:spcBef>
+              <a:buFont typeface="Arial"/>
+              <a:buChar char="•"/>
+            </a:pPr>
+            <a:r>
+              <a:rPr lang="en-US" sz="3399">
+                <a:solidFill>
+                  <a:srgbClr val="000000"/>
+                </a:solidFill>
+                <a:latin typeface="DM Serif Display"/>
+                <a:ea typeface="DM Serif Display"/>
+                <a:cs typeface="DM Serif Display"/>
+                <a:sym typeface="DM Serif Display"/>
+              </a:rPr>
+              <a:t>Chưa triển khai chức năng gửi email hoặc thông báo tự động.</a:t>
+            </a:r>
+          </a:p>
+          <a:p>
+            <a:pPr algn="l">
+              <a:lnSpc>
+                <a:spcPts val="4759"/>
+              </a:lnSpc>
+              <a:spcBef>
+                <a:spcPct val="0"/>
+              </a:spcBef>
+            </a:pPr>
+            <a:r>
+              <a:rPr lang="en-US" sz="3399">
+                <a:solidFill>
+                  <a:srgbClr val="000000"/>
+                </a:solidFill>
+                <a:latin typeface="DM Serif Display"/>
+                <a:ea typeface="DM Serif Display"/>
+                <a:cs typeface="DM Serif Display"/>
+                <a:sym typeface="DM Serif Display"/>
+              </a:rPr>
+              <a:t> </a:t>
+            </a:r>
+          </a:p>
+          <a:p>
+            <a:pPr algn="l">
+              <a:lnSpc>
+                <a:spcPts val="4759"/>
+              </a:lnSpc>
+              <a:spcBef>
+                <a:spcPct val="0"/>
+              </a:spcBef>
+            </a:pPr>
+            <a:r>
+              <a:rPr lang="en-US" sz="3399">
+                <a:solidFill>
+                  <a:srgbClr val="000000"/>
+                </a:solidFill>
+                <a:latin typeface="DM Serif Display"/>
+                <a:ea typeface="DM Serif Display"/>
+                <a:cs typeface="DM Serif Display"/>
+                <a:sym typeface="DM Serif Display"/>
+              </a:rPr>
+              <a:t>Hệ thống hiện mới hoạt động trên môi trường cục bộ và chưa được triển khai thực tế trên máy chủ hoặc nền tảng đám mây. Ngoài ra, các tính năng nâng cao như biểu đồ thống kê trực quan, ứng dụng di động vẫn chưa được thực hiện. </a:t>
             </a:r>
           </a:p>
         </p:txBody>
@@ -4667,7 +4631,7 @@
         </p:nvSpPr>
         <p:spPr>
           <a:xfrm>
-            <a:off x="0" y="0"/>
+            <a:off x="0" y="54685"/>
             <a:ext cx="18288000" cy="10287000"/>
           </a:xfrm>
           <a:custGeom>
@@ -4715,8 +4679,8 @@
         </p:nvSpPr>
         <p:spPr>
           <a:xfrm>
-            <a:off x="297737" y="443073"/>
-            <a:ext cx="9316373" cy="778510"/>
+            <a:off x="1028700" y="720868"/>
+            <a:ext cx="4273451" cy="758825"/>
           </a:xfrm>
           <a:prstGeom prst="rect">
             <a:avLst/>
@@ -4730,20 +4694,23 @@
           <a:p>
             <a:pPr algn="ctr">
               <a:lnSpc>
-                <a:spcPts val="6439"/>
-              </a:lnSpc>
-            </a:pPr>
-            <a:r>
-              <a:rPr lang="en-US" sz="4599">
-                <a:solidFill>
-                  <a:srgbClr val="000000"/>
-                </a:solidFill>
-                <a:latin typeface="DM Serif Display"/>
-                <a:ea typeface="DM Serif Display"/>
-                <a:cs typeface="DM Serif Display"/>
-                <a:sym typeface="DM Serif Display"/>
-              </a:rPr>
-              <a:t>IX.Hạn chế và hướng phát triển</a:t>
+                <a:spcPts val="6460"/>
+              </a:lnSpc>
+              <a:spcBef>
+                <a:spcPct val="0"/>
+              </a:spcBef>
+            </a:pPr>
+            <a:r>
+              <a:rPr lang="en-US" sz="3800">
+                <a:solidFill>
+                  <a:srgbClr val="000000"/>
+                </a:solidFill>
+                <a:latin typeface="DM Serif Display"/>
+                <a:ea typeface="DM Serif Display"/>
+                <a:cs typeface="DM Serif Display"/>
+                <a:sym typeface="DM Serif Display"/>
+              </a:rPr>
+              <a:t>b. Hướng phát triển</a:t>
             </a:r>
           </a:p>
         </p:txBody>
@@ -4756,8 +4723,8 @@
         </p:nvSpPr>
         <p:spPr>
           <a:xfrm>
-            <a:off x="1446834" y="1848533"/>
-            <a:ext cx="2240905" cy="646430"/>
+            <a:off x="1512803" y="1634801"/>
+            <a:ext cx="14954084" cy="8372475"/>
           </a:xfrm>
           <a:prstGeom prst="rect">
             <a:avLst/>
@@ -4769,81 +4736,169 @@
           </a:bodyPr>
           <a:lstStyle/>
           <a:p>
-            <a:pPr algn="ctr">
-              <a:lnSpc>
-                <a:spcPts val="5320"/>
+            <a:pPr algn="just">
+              <a:lnSpc>
+                <a:spcPts val="5100"/>
               </a:lnSpc>
               <a:spcBef>
                 <a:spcPct val="0"/>
               </a:spcBef>
             </a:pPr>
             <a:r>
-              <a:rPr lang="en-US" sz="3800">
-                <a:solidFill>
-                  <a:srgbClr val="000000"/>
-                </a:solidFill>
-                <a:latin typeface="DM Serif Display"/>
-                <a:ea typeface="DM Serif Display"/>
-                <a:cs typeface="DM Serif Display"/>
-                <a:sym typeface="DM Serif Display"/>
-              </a:rPr>
-              <a:t>a. Hạn chế</a:t>
-            </a:r>
-          </a:p>
-        </p:txBody>
-      </p:sp>
-      <p:sp>
-        <p:nvSpPr>
-          <p:cNvPr id="5" name="TextBox 5"/>
-          <p:cNvSpPr txBox="1"/>
-          <p:nvPr/>
-        </p:nvSpPr>
-        <p:spPr>
-          <a:xfrm>
-            <a:off x="1831633" y="3142663"/>
-            <a:ext cx="15996644" cy="4771390"/>
-          </a:xfrm>
-          <a:prstGeom prst="rect">
-            <a:avLst/>
-          </a:prstGeom>
-        </p:spPr>
-        <p:txBody>
-          <a:bodyPr lIns="0" tIns="0" rIns="0" bIns="0" rtlCol="0" anchor="t">
-            <a:spAutoFit/>
-          </a:bodyPr>
-          <a:lstStyle/>
-          <a:p>
-            <a:pPr algn="l">
-              <a:lnSpc>
-                <a:spcPts val="4759"/>
+              <a:rPr lang="en-US" sz="3000">
+                <a:solidFill>
+                  <a:srgbClr val="000000"/>
+                </a:solidFill>
+                <a:latin typeface="DM Serif Display"/>
+                <a:ea typeface="DM Serif Display"/>
+                <a:cs typeface="DM Serif Display"/>
+                <a:sym typeface="DM Serif Display"/>
+              </a:rPr>
+              <a:t>Do giới hạn về thời gian và phạm vi của đồ án môn học, hệ thống hiện chỉ dừng lại ở mức demo và đáp ứng các yêu cầu cơ bản. Trong tương lai, nếu có điều kiện phát triển thêm, hệ thống có thể được bổ sung một số chức năng như: </a:t>
+            </a:r>
+          </a:p>
+          <a:p>
+            <a:pPr algn="just">
+              <a:lnSpc>
+                <a:spcPts val="5100"/>
               </a:lnSpc>
               <a:spcBef>
                 <a:spcPct val="0"/>
               </a:spcBef>
             </a:pPr>
             <a:r>
-              <a:rPr lang="en-US" sz="3399">
-                <a:solidFill>
-                  <a:srgbClr val="000000"/>
-                </a:solidFill>
-                <a:latin typeface="DM Serif Display"/>
-                <a:ea typeface="DM Serif Display"/>
-                <a:cs typeface="DM Serif Display"/>
-                <a:sym typeface="DM Serif Display"/>
-              </a:rPr>
-              <a:t>Bên cạnh những kết quả đạt được, hệ thống vẫn còn một số hạn chế như : </a:t>
-            </a:r>
-          </a:p>
-          <a:p>
-            <a:pPr algn="l">
-              <a:lnSpc>
-                <a:spcPts val="4759"/>
+              <a:rPr lang="en-US" sz="3000">
+                <a:solidFill>
+                  <a:srgbClr val="000000"/>
+                </a:solidFill>
+                <a:latin typeface="DM Serif Display"/>
+                <a:ea typeface="DM Serif Display"/>
+                <a:cs typeface="DM Serif Display"/>
+                <a:sym typeface="DM Serif Display"/>
+              </a:rPr>
+              <a:t>     + Quản lý bàn và sơ đồ quán cà phê.</a:t>
+            </a:r>
+          </a:p>
+          <a:p>
+            <a:pPr algn="just">
+              <a:lnSpc>
+                <a:spcPts val="5100"/>
               </a:lnSpc>
               <a:spcBef>
                 <a:spcPct val="0"/>
               </a:spcBef>
             </a:pPr>
-            <a:endParaRPr lang="en-US" sz="3399">
+            <a:r>
+              <a:rPr lang="en-US" sz="3000">
+                <a:solidFill>
+                  <a:srgbClr val="000000"/>
+                </a:solidFill>
+                <a:latin typeface="DM Serif Display"/>
+                <a:ea typeface="DM Serif Display"/>
+                <a:cs typeface="DM Serif Display"/>
+                <a:sym typeface="DM Serif Display"/>
+              </a:rPr>
+              <a:t>     + Quản lý khách hàng thân thiết và tích điểm thành viên. </a:t>
+            </a:r>
+          </a:p>
+          <a:p>
+            <a:pPr algn="just">
+              <a:lnSpc>
+                <a:spcPts val="5100"/>
+              </a:lnSpc>
+              <a:spcBef>
+                <a:spcPct val="0"/>
+              </a:spcBef>
+            </a:pPr>
+            <a:r>
+              <a:rPr lang="en-US" sz="3000">
+                <a:solidFill>
+                  <a:srgbClr val="000000"/>
+                </a:solidFill>
+                <a:latin typeface="DM Serif Display"/>
+                <a:ea typeface="DM Serif Display"/>
+                <a:cs typeface="DM Serif Display"/>
+                <a:sym typeface="DM Serif Display"/>
+              </a:rPr>
+              <a:t>     + Thống kê doanh thu bằng biểu đồ trực quan. </a:t>
+            </a:r>
+          </a:p>
+          <a:p>
+            <a:pPr algn="just">
+              <a:lnSpc>
+                <a:spcPts val="5100"/>
+              </a:lnSpc>
+              <a:spcBef>
+                <a:spcPct val="0"/>
+              </a:spcBef>
+            </a:pPr>
+            <a:r>
+              <a:rPr lang="en-US" sz="3000">
+                <a:solidFill>
+                  <a:srgbClr val="000000"/>
+                </a:solidFill>
+                <a:latin typeface="DM Serif Display"/>
+                <a:ea typeface="DM Serif Display"/>
+                <a:cs typeface="DM Serif Display"/>
+                <a:sym typeface="DM Serif Display"/>
+              </a:rPr>
+              <a:t>     + Xuất hóa đơn và báo cáo dưới dạng PDF hoặc Excel. </a:t>
+            </a:r>
+          </a:p>
+          <a:p>
+            <a:pPr algn="just">
+              <a:lnSpc>
+                <a:spcPts val="5100"/>
+              </a:lnSpc>
+              <a:spcBef>
+                <a:spcPct val="0"/>
+              </a:spcBef>
+            </a:pPr>
+            <a:r>
+              <a:rPr lang="en-US" sz="3000">
+                <a:solidFill>
+                  <a:srgbClr val="000000"/>
+                </a:solidFill>
+                <a:latin typeface="DM Serif Display"/>
+                <a:ea typeface="DM Serif Display"/>
+                <a:cs typeface="DM Serif Display"/>
+                <a:sym typeface="DM Serif Display"/>
+              </a:rPr>
+              <a:t>     + Cải thiện giao diện người dùng để thân thiện và hiện đại hơn. </a:t>
+            </a:r>
+          </a:p>
+          <a:p>
+            <a:pPr algn="just">
+              <a:lnSpc>
+                <a:spcPts val="5100"/>
+              </a:lnSpc>
+              <a:spcBef>
+                <a:spcPct val="0"/>
+              </a:spcBef>
+            </a:pPr>
+            <a:r>
+              <a:rPr lang="en-US" sz="3000">
+                <a:solidFill>
+                  <a:srgbClr val="000000"/>
+                </a:solidFill>
+                <a:latin typeface="DM Serif Display"/>
+                <a:ea typeface="DM Serif Display"/>
+                <a:cs typeface="DM Serif Display"/>
+                <a:sym typeface="DM Serif Display"/>
+              </a:rPr>
+              <a:t>     + Tối ưu hiệu năng và nâng cao tính bảo mật cho hệ thống.</a:t>
+            </a:r>
+          </a:p>
+          <a:p>
+            <a:pPr algn="just">
+              <a:lnSpc>
+                <a:spcPts val="5100"/>
+              </a:lnSpc>
+              <a:spcBef>
+                <a:spcPct val="0"/>
+              </a:spcBef>
+            </a:pPr>
+            <a:endParaRPr lang="en-US" sz="3000">
               <a:solidFill>
                 <a:srgbClr val="000000"/>
               </a:solidFill>
@@ -4854,95 +4909,25 @@
             </a:endParaRPr>
           </a:p>
           <a:p>
-            <a:pPr marL="734059" lvl="1" indent="-367030" algn="l">
-              <a:lnSpc>
-                <a:spcPts val="4759"/>
+            <a:pPr algn="just">
+              <a:lnSpc>
+                <a:spcPts val="5100"/>
               </a:lnSpc>
               <a:spcBef>
                 <a:spcPct val="0"/>
               </a:spcBef>
-              <a:buFont typeface="Arial"/>
-              <a:buChar char="•"/>
-            </a:pPr>
-            <a:r>
-              <a:rPr lang="en-US" sz="3399">
-                <a:solidFill>
-                  <a:srgbClr val="000000"/>
-                </a:solidFill>
-                <a:latin typeface="DM Serif Display"/>
-                <a:ea typeface="DM Serif Display"/>
-                <a:cs typeface="DM Serif Display"/>
-                <a:sym typeface="DM Serif Display"/>
-              </a:rPr>
-              <a:t>Chưa hỗ trợ đặt hàng online từ phía khách hàng</a:t>
-            </a:r>
-          </a:p>
-          <a:p>
-            <a:pPr marL="734059" lvl="1" indent="-367030" algn="l">
-              <a:lnSpc>
-                <a:spcPts val="4759"/>
-              </a:lnSpc>
-              <a:spcBef>
-                <a:spcPct val="0"/>
-              </a:spcBef>
-              <a:buFont typeface="Arial"/>
-              <a:buChar char="•"/>
-            </a:pPr>
-            <a:r>
-              <a:rPr lang="en-US" sz="3399">
-                <a:solidFill>
-                  <a:srgbClr val="000000"/>
-                </a:solidFill>
-                <a:latin typeface="DM Serif Display"/>
-                <a:ea typeface="DM Serif Display"/>
-                <a:cs typeface="DM Serif Display"/>
-                <a:sym typeface="DM Serif Display"/>
-              </a:rPr>
-              <a:t>Chưa triển khai chức năng gửi email hoặc thông báo tự động.</a:t>
-            </a:r>
-          </a:p>
-          <a:p>
-            <a:pPr algn="l">
-              <a:lnSpc>
-                <a:spcPts val="4759"/>
-              </a:lnSpc>
-              <a:spcBef>
-                <a:spcPct val="0"/>
-              </a:spcBef>
-            </a:pPr>
-            <a:r>
-              <a:rPr lang="en-US" sz="3399">
-                <a:solidFill>
-                  <a:srgbClr val="000000"/>
-                </a:solidFill>
-                <a:latin typeface="DM Serif Display"/>
-                <a:ea typeface="DM Serif Display"/>
-                <a:cs typeface="DM Serif Display"/>
-                <a:sym typeface="DM Serif Display"/>
-              </a:rPr>
-              <a:t> </a:t>
-            </a:r>
-          </a:p>
-          <a:p>
-            <a:pPr algn="l">
-              <a:lnSpc>
-                <a:spcPts val="4759"/>
-              </a:lnSpc>
-              <a:spcBef>
-                <a:spcPct val="0"/>
-              </a:spcBef>
-            </a:pPr>
-            <a:r>
-              <a:rPr lang="en-US" sz="3399">
-                <a:solidFill>
-                  <a:srgbClr val="000000"/>
-                </a:solidFill>
-                <a:latin typeface="DM Serif Display"/>
-                <a:ea typeface="DM Serif Display"/>
-                <a:cs typeface="DM Serif Display"/>
-                <a:sym typeface="DM Serif Display"/>
-              </a:rPr>
-              <a:t>Hệ thống hiện mới hoạt động trên môi trường cục bộ và chưa được triển khai thực tế trên máy chủ hoặc nền tảng đám mây. Ngoài ra, các tính năng nâng cao như biểu đồ thống kê trực quan, ứng dụng di động vẫn chưa được thực hiện. </a:t>
+            </a:pPr>
+            <a:r>
+              <a:rPr lang="en-US" sz="3000">
+                <a:solidFill>
+                  <a:srgbClr val="000000"/>
+                </a:solidFill>
+                <a:latin typeface="DM Serif Display"/>
+                <a:ea typeface="DM Serif Display"/>
+                <a:cs typeface="DM Serif Display"/>
+                <a:sym typeface="DM Serif Display"/>
+              </a:rPr>
+              <a:t> Nhìn chung, đề tài đã hoàn thành các mục tiêu được đặt ra ban đầu, đáp ứng yêu cầu của môn học và là cơ sở để nhóm tiếp tục nghiên cứu, phát triển các dự án Web thực tế trong tương lai.</a:t>
             </a:r>
           </a:p>
         </p:txBody>
@@ -4956,340 +4941,6 @@
 </file>
 
 <file path=ppt/slides/slide15.xml><?xml version="1.0" encoding="utf-8"?>
-<p:sld xmlns:a="http://schemas.openxmlformats.org/drawingml/2006/main" xmlns:r="http://schemas.openxmlformats.org/officeDocument/2006/relationships" xmlns:p="http://schemas.openxmlformats.org/presentationml/2006/main">
-  <p:cSld>
-    <p:spTree>
-      <p:nvGrpSpPr>
-        <p:cNvPr id="1" name=""/>
-        <p:cNvGrpSpPr/>
-        <p:nvPr/>
-      </p:nvGrpSpPr>
-      <p:grpSpPr>
-        <a:xfrm>
-          <a:off x="0" y="0"/>
-          <a:ext cx="0" cy="0"/>
-          <a:chOff x="0" y="0"/>
-          <a:chExt cx="0" cy="0"/>
-        </a:xfrm>
-      </p:grpSpPr>
-      <p:sp>
-        <p:nvSpPr>
-          <p:cNvPr id="2" name="Freeform 2"/>
-          <p:cNvSpPr/>
-          <p:nvPr/>
-        </p:nvSpPr>
-        <p:spPr>
-          <a:xfrm>
-            <a:off x="0" y="54685"/>
-            <a:ext cx="18288000" cy="10287000"/>
-          </a:xfrm>
-          <a:custGeom>
-            <a:avLst/>
-            <a:gdLst/>
-            <a:ahLst/>
-            <a:cxnLst/>
-            <a:rect l="l" t="t" r="r" b="b"/>
-            <a:pathLst>
-              <a:path w="18288000" h="10287000">
-                <a:moveTo>
-                  <a:pt x="0" y="0"/>
-                </a:moveTo>
-                <a:lnTo>
-                  <a:pt x="18288000" y="0"/>
-                </a:lnTo>
-                <a:lnTo>
-                  <a:pt x="18288000" y="10287000"/>
-                </a:lnTo>
-                <a:lnTo>
-                  <a:pt x="0" y="10287000"/>
-                </a:lnTo>
-                <a:lnTo>
-                  <a:pt x="0" y="0"/>
-                </a:lnTo>
-                <a:close/>
-              </a:path>
-            </a:pathLst>
-          </a:custGeom>
-          <a:blipFill>
-            <a:blip r:embed="rId2">
-              <a:alphaModFix amt="50000"/>
-            </a:blip>
-            <a:stretch>
-              <a:fillRect/>
-            </a:stretch>
-          </a:blipFill>
-        </p:spPr>
-      </p:sp>
-      <p:sp>
-        <p:nvSpPr>
-          <p:cNvPr id="3" name="TextBox 3"/>
-          <p:cNvSpPr txBox="1"/>
-          <p:nvPr/>
-        </p:nvSpPr>
-        <p:spPr>
-          <a:xfrm>
-            <a:off x="1028700" y="720868"/>
-            <a:ext cx="4273451" cy="758825"/>
-          </a:xfrm>
-          <a:prstGeom prst="rect">
-            <a:avLst/>
-          </a:prstGeom>
-        </p:spPr>
-        <p:txBody>
-          <a:bodyPr lIns="0" tIns="0" rIns="0" bIns="0" rtlCol="0" anchor="t">
-            <a:spAutoFit/>
-          </a:bodyPr>
-          <a:lstStyle/>
-          <a:p>
-            <a:pPr algn="ctr">
-              <a:lnSpc>
-                <a:spcPts val="6460"/>
-              </a:lnSpc>
-              <a:spcBef>
-                <a:spcPct val="0"/>
-              </a:spcBef>
-            </a:pPr>
-            <a:r>
-              <a:rPr lang="en-US" sz="3800">
-                <a:solidFill>
-                  <a:srgbClr val="000000"/>
-                </a:solidFill>
-                <a:latin typeface="DM Serif Display"/>
-                <a:ea typeface="DM Serif Display"/>
-                <a:cs typeface="DM Serif Display"/>
-                <a:sym typeface="DM Serif Display"/>
-              </a:rPr>
-              <a:t>b. Hướng phát triển</a:t>
-            </a:r>
-          </a:p>
-        </p:txBody>
-      </p:sp>
-      <p:sp>
-        <p:nvSpPr>
-          <p:cNvPr id="4" name="TextBox 4"/>
-          <p:cNvSpPr txBox="1"/>
-          <p:nvPr/>
-        </p:nvSpPr>
-        <p:spPr>
-          <a:xfrm>
-            <a:off x="1512803" y="1634801"/>
-            <a:ext cx="14954084" cy="8372475"/>
-          </a:xfrm>
-          <a:prstGeom prst="rect">
-            <a:avLst/>
-          </a:prstGeom>
-        </p:spPr>
-        <p:txBody>
-          <a:bodyPr lIns="0" tIns="0" rIns="0" bIns="0" rtlCol="0" anchor="t">
-            <a:spAutoFit/>
-          </a:bodyPr>
-          <a:lstStyle/>
-          <a:p>
-            <a:pPr algn="just">
-              <a:lnSpc>
-                <a:spcPts val="5100"/>
-              </a:lnSpc>
-              <a:spcBef>
-                <a:spcPct val="0"/>
-              </a:spcBef>
-            </a:pPr>
-            <a:r>
-              <a:rPr lang="en-US" sz="3000">
-                <a:solidFill>
-                  <a:srgbClr val="000000"/>
-                </a:solidFill>
-                <a:latin typeface="DM Serif Display"/>
-                <a:ea typeface="DM Serif Display"/>
-                <a:cs typeface="DM Serif Display"/>
-                <a:sym typeface="DM Serif Display"/>
-              </a:rPr>
-              <a:t>Do giới hạn về thời gian và phạm vi của đồ án môn học, hệ thống hiện chỉ dừng lại ở mức demo và đáp ứng các yêu cầu cơ bản. Trong tương lai, nếu có điều kiện phát triển thêm, hệ thống có thể được bổ sung một số chức năng như: </a:t>
-            </a:r>
-          </a:p>
-          <a:p>
-            <a:pPr algn="just">
-              <a:lnSpc>
-                <a:spcPts val="5100"/>
-              </a:lnSpc>
-              <a:spcBef>
-                <a:spcPct val="0"/>
-              </a:spcBef>
-            </a:pPr>
-            <a:r>
-              <a:rPr lang="en-US" sz="3000">
-                <a:solidFill>
-                  <a:srgbClr val="000000"/>
-                </a:solidFill>
-                <a:latin typeface="DM Serif Display"/>
-                <a:ea typeface="DM Serif Display"/>
-                <a:cs typeface="DM Serif Display"/>
-                <a:sym typeface="DM Serif Display"/>
-              </a:rPr>
-              <a:t>     + Quản lý bàn và sơ đồ quán cà phê.</a:t>
-            </a:r>
-          </a:p>
-          <a:p>
-            <a:pPr algn="just">
-              <a:lnSpc>
-                <a:spcPts val="5100"/>
-              </a:lnSpc>
-              <a:spcBef>
-                <a:spcPct val="0"/>
-              </a:spcBef>
-            </a:pPr>
-            <a:r>
-              <a:rPr lang="en-US" sz="3000">
-                <a:solidFill>
-                  <a:srgbClr val="000000"/>
-                </a:solidFill>
-                <a:latin typeface="DM Serif Display"/>
-                <a:ea typeface="DM Serif Display"/>
-                <a:cs typeface="DM Serif Display"/>
-                <a:sym typeface="DM Serif Display"/>
-              </a:rPr>
-              <a:t>     + Quản lý khách hàng thân thiết và tích điểm thành viên. </a:t>
-            </a:r>
-          </a:p>
-          <a:p>
-            <a:pPr algn="just">
-              <a:lnSpc>
-                <a:spcPts val="5100"/>
-              </a:lnSpc>
-              <a:spcBef>
-                <a:spcPct val="0"/>
-              </a:spcBef>
-            </a:pPr>
-            <a:r>
-              <a:rPr lang="en-US" sz="3000">
-                <a:solidFill>
-                  <a:srgbClr val="000000"/>
-                </a:solidFill>
-                <a:latin typeface="DM Serif Display"/>
-                <a:ea typeface="DM Serif Display"/>
-                <a:cs typeface="DM Serif Display"/>
-                <a:sym typeface="DM Serif Display"/>
-              </a:rPr>
-              <a:t>     + Thống kê doanh thu bằng biểu đồ trực quan. </a:t>
-            </a:r>
-          </a:p>
-          <a:p>
-            <a:pPr algn="just">
-              <a:lnSpc>
-                <a:spcPts val="5100"/>
-              </a:lnSpc>
-              <a:spcBef>
-                <a:spcPct val="0"/>
-              </a:spcBef>
-            </a:pPr>
-            <a:r>
-              <a:rPr lang="en-US" sz="3000">
-                <a:solidFill>
-                  <a:srgbClr val="000000"/>
-                </a:solidFill>
-                <a:latin typeface="DM Serif Display"/>
-                <a:ea typeface="DM Serif Display"/>
-                <a:cs typeface="DM Serif Display"/>
-                <a:sym typeface="DM Serif Display"/>
-              </a:rPr>
-              <a:t>     + Xuất hóa đơn và báo cáo dưới dạng PDF hoặc Excel. </a:t>
-            </a:r>
-          </a:p>
-          <a:p>
-            <a:pPr algn="just">
-              <a:lnSpc>
-                <a:spcPts val="5100"/>
-              </a:lnSpc>
-              <a:spcBef>
-                <a:spcPct val="0"/>
-              </a:spcBef>
-            </a:pPr>
-            <a:r>
-              <a:rPr lang="en-US" sz="3000">
-                <a:solidFill>
-                  <a:srgbClr val="000000"/>
-                </a:solidFill>
-                <a:latin typeface="DM Serif Display"/>
-                <a:ea typeface="DM Serif Display"/>
-                <a:cs typeface="DM Serif Display"/>
-                <a:sym typeface="DM Serif Display"/>
-              </a:rPr>
-              <a:t>     + Cải thiện giao diện người dùng để thân thiện và hiện đại hơn. </a:t>
-            </a:r>
-          </a:p>
-          <a:p>
-            <a:pPr algn="just">
-              <a:lnSpc>
-                <a:spcPts val="5100"/>
-              </a:lnSpc>
-              <a:spcBef>
-                <a:spcPct val="0"/>
-              </a:spcBef>
-            </a:pPr>
-            <a:r>
-              <a:rPr lang="en-US" sz="3000">
-                <a:solidFill>
-                  <a:srgbClr val="000000"/>
-                </a:solidFill>
-                <a:latin typeface="DM Serif Display"/>
-                <a:ea typeface="DM Serif Display"/>
-                <a:cs typeface="DM Serif Display"/>
-                <a:sym typeface="DM Serif Display"/>
-              </a:rPr>
-              <a:t>     + Tối ưu hiệu năng và nâng cao tính bảo mật cho hệ thống.</a:t>
-            </a:r>
-          </a:p>
-          <a:p>
-            <a:pPr algn="just">
-              <a:lnSpc>
-                <a:spcPts val="5100"/>
-              </a:lnSpc>
-              <a:spcBef>
-                <a:spcPct val="0"/>
-              </a:spcBef>
-            </a:pPr>
-            <a:endParaRPr lang="en-US" sz="3000">
-              <a:solidFill>
-                <a:srgbClr val="000000"/>
-              </a:solidFill>
-              <a:latin typeface="DM Serif Display"/>
-              <a:ea typeface="DM Serif Display"/>
-              <a:cs typeface="DM Serif Display"/>
-              <a:sym typeface="DM Serif Display"/>
-            </a:endParaRPr>
-          </a:p>
-          <a:p>
-            <a:pPr algn="just">
-              <a:lnSpc>
-                <a:spcPts val="5100"/>
-              </a:lnSpc>
-              <a:spcBef>
-                <a:spcPct val="0"/>
-              </a:spcBef>
-            </a:pPr>
-            <a:r>
-              <a:rPr lang="en-US" sz="3000">
-                <a:solidFill>
-                  <a:srgbClr val="000000"/>
-                </a:solidFill>
-                <a:latin typeface="DM Serif Display"/>
-                <a:ea typeface="DM Serif Display"/>
-                <a:cs typeface="DM Serif Display"/>
-                <a:sym typeface="DM Serif Display"/>
-              </a:rPr>
-              <a:t> Nhìn chung, đề tài đã hoàn thành các mục tiêu được đặt ra ban đầu, đáp ứng yêu cầu của môn học và là cơ sở để nhóm tiếp tục nghiên cứu, phát triển các dự án Web thực tế trong tương lai.</a:t>
-            </a:r>
-          </a:p>
-        </p:txBody>
-      </p:sp>
-    </p:spTree>
-  </p:cSld>
-  <p:clrMapOvr>
-    <a:masterClrMapping/>
-  </p:clrMapOvr>
-</p:sld>
-</file>
-
-<file path=ppt/slides/slide16.xml><?xml version="1.0" encoding="utf-8"?>
 <p:sld xmlns:a="http://schemas.openxmlformats.org/drawingml/2006/main" xmlns:r="http://schemas.openxmlformats.org/officeDocument/2006/relationships" xmlns:p="http://schemas.openxmlformats.org/presentationml/2006/main">
   <p:cSld>
     <p:bg>
